--- a/examples/pm7_splitted_insertion/splitted_insertion_merged.pptx
+++ b/examples/pm7_splitted_insertion/splitted_insertion_merged.pptx
@@ -765,7 +765,7 @@
     </p:spTree>
     <p:extLst>
       <p:ext uri="{BB962C8B-B14F-4D97-AF65-F5344CB8AC3E}">
-        <p14:creationId xmlns:p14="http://schemas.microsoft.com/office/powerpoint/2010/main" val="2891413353"/>
+        <p14:creationId xmlns:p14="http://schemas.microsoft.com/office/powerpoint/2010/main" val="3845104084"/>
       </p:ext>
     </p:extLst>
   </p:cSld>
@@ -1001,7 +1001,7 @@
     </p:spTree>
     <p:extLst>
       <p:ext uri="{BB962C8B-B14F-4D97-AF65-F5344CB8AC3E}">
-        <p14:creationId xmlns:p14="http://schemas.microsoft.com/office/powerpoint/2010/main" val="1565689713"/>
+        <p14:creationId xmlns:p14="http://schemas.microsoft.com/office/powerpoint/2010/main" val="719783668"/>
       </p:ext>
     </p:extLst>
   </p:cSld>
@@ -1220,7 +1220,7 @@
     </p:spTree>
     <p:extLst>
       <p:ext uri="{BB962C8B-B14F-4D97-AF65-F5344CB8AC3E}">
-        <p14:creationId xmlns:p14="http://schemas.microsoft.com/office/powerpoint/2010/main" val="497199717"/>
+        <p14:creationId xmlns:p14="http://schemas.microsoft.com/office/powerpoint/2010/main" val="2553582895"/>
       </p:ext>
     </p:extLst>
   </p:cSld>
@@ -5475,7 +5475,7 @@
     </p:spTree>
     <p:extLst>
       <p:ext uri="{BB962C8B-B14F-4D97-AF65-F5344CB8AC3E}">
-        <p14:creationId xmlns:p14="http://schemas.microsoft.com/office/powerpoint/2010/main" val="3511969154"/>
+        <p14:creationId xmlns:p14="http://schemas.microsoft.com/office/powerpoint/2010/main" val="1003084797"/>
       </p:ext>
     </p:extLst>
   </p:cSld>
@@ -7338,7 +7338,7 @@
     </p:spTree>
     <p:extLst>
       <p:ext uri="{BB962C8B-B14F-4D97-AF65-F5344CB8AC3E}">
-        <p14:creationId xmlns:p14="http://schemas.microsoft.com/office/powerpoint/2010/main" val="2968761090"/>
+        <p14:creationId xmlns:p14="http://schemas.microsoft.com/office/powerpoint/2010/main" val="765233148"/>
       </p:ext>
     </p:extLst>
   </p:cSld>
@@ -7997,7 +7997,7 @@
     </p:spTree>
     <p:extLst>
       <p:ext uri="{BB962C8B-B14F-4D97-AF65-F5344CB8AC3E}">
-        <p14:creationId xmlns:p14="http://schemas.microsoft.com/office/powerpoint/2010/main" val="2989770727"/>
+        <p14:creationId xmlns:p14="http://schemas.microsoft.com/office/powerpoint/2010/main" val="3755191611"/>
       </p:ext>
     </p:extLst>
   </p:cSld>
@@ -8293,7 +8293,7 @@
     </p:spTree>
     <p:extLst>
       <p:ext uri="{BB962C8B-B14F-4D97-AF65-F5344CB8AC3E}">
-        <p14:creationId xmlns:p14="http://schemas.microsoft.com/office/powerpoint/2010/main" val="3636126543"/>
+        <p14:creationId xmlns:p14="http://schemas.microsoft.com/office/powerpoint/2010/main" val="3763950227"/>
       </p:ext>
     </p:extLst>
   </p:cSld>
@@ -8511,7 +8511,7 @@
     </p:spTree>
     <p:extLst>
       <p:ext uri="{BB962C8B-B14F-4D97-AF65-F5344CB8AC3E}">
-        <p14:creationId xmlns:p14="http://schemas.microsoft.com/office/powerpoint/2010/main" val="4265337541"/>
+        <p14:creationId xmlns:p14="http://schemas.microsoft.com/office/powerpoint/2010/main" val="2700890625"/>
       </p:ext>
     </p:extLst>
   </p:cSld>
@@ -8743,7 +8743,7 @@
     </p:spTree>
     <p:extLst>
       <p:ext uri="{BB962C8B-B14F-4D97-AF65-F5344CB8AC3E}">
-        <p14:creationId xmlns:p14="http://schemas.microsoft.com/office/powerpoint/2010/main" val="314974579"/>
+        <p14:creationId xmlns:p14="http://schemas.microsoft.com/office/powerpoint/2010/main" val="2506411345"/>
       </p:ext>
     </p:extLst>
   </p:cSld>
@@ -8983,7 +8983,7 @@
     </p:spTree>
     <p:extLst>
       <p:ext uri="{BB962C8B-B14F-4D97-AF65-F5344CB8AC3E}">
-        <p14:creationId xmlns:p14="http://schemas.microsoft.com/office/powerpoint/2010/main" val="3634284296"/>
+        <p14:creationId xmlns:p14="http://schemas.microsoft.com/office/powerpoint/2010/main" val="448363648"/>
       </p:ext>
     </p:extLst>
   </p:cSld>
@@ -9201,7 +9201,7 @@
     </p:spTree>
     <p:extLst>
       <p:ext uri="{BB962C8B-B14F-4D97-AF65-F5344CB8AC3E}">
-        <p14:creationId xmlns:p14="http://schemas.microsoft.com/office/powerpoint/2010/main" val="3980303443"/>
+        <p14:creationId xmlns:p14="http://schemas.microsoft.com/office/powerpoint/2010/main" val="507451831"/>
       </p:ext>
     </p:extLst>
   </p:cSld>
@@ -9441,7 +9441,7 @@
     </p:spTree>
     <p:extLst>
       <p:ext uri="{BB962C8B-B14F-4D97-AF65-F5344CB8AC3E}">
-        <p14:creationId xmlns:p14="http://schemas.microsoft.com/office/powerpoint/2010/main" val="3602264722"/>
+        <p14:creationId xmlns:p14="http://schemas.microsoft.com/office/powerpoint/2010/main" val="341572314"/>
       </p:ext>
     </p:extLst>
   </p:cSld>

--- a/examples/pm7_splitted_insertion/splitted_insertion_merged.pptx
+++ b/examples/pm7_splitted_insertion/splitted_insertion_merged.pptx
@@ -246,7 +246,7 @@
           <a:p>
             <a:fld id="{294670BC-B8C6-44A7-84E1-23632D8FD86F}" type="datetimeFigureOut">
               <a:rPr kumimoji="1" lang="ja-JP" altLang="en-US" smtClean="0"/>
-              <a:t>2026/6/4</a:t>
+              <a:t>2026/6/6</a:t>
             </a:fld>
             <a:endParaRPr kumimoji="1" lang="ja-JP" altLang="en-US"/>
           </a:p>
@@ -765,7 +765,7 @@
     </p:spTree>
     <p:extLst>
       <p:ext uri="{BB962C8B-B14F-4D97-AF65-F5344CB8AC3E}">
-        <p14:creationId xmlns:p14="http://schemas.microsoft.com/office/powerpoint/2010/main" val="3845104084"/>
+        <p14:creationId xmlns:p14="http://schemas.microsoft.com/office/powerpoint/2010/main" val="2230718695"/>
       </p:ext>
     </p:extLst>
   </p:cSld>
@@ -1001,7 +1001,7 @@
     </p:spTree>
     <p:extLst>
       <p:ext uri="{BB962C8B-B14F-4D97-AF65-F5344CB8AC3E}">
-        <p14:creationId xmlns:p14="http://schemas.microsoft.com/office/powerpoint/2010/main" val="719783668"/>
+        <p14:creationId xmlns:p14="http://schemas.microsoft.com/office/powerpoint/2010/main" val="2707271550"/>
       </p:ext>
     </p:extLst>
   </p:cSld>
@@ -1220,7 +1220,7 @@
     </p:spTree>
     <p:extLst>
       <p:ext uri="{BB962C8B-B14F-4D97-AF65-F5344CB8AC3E}">
-        <p14:creationId xmlns:p14="http://schemas.microsoft.com/office/powerpoint/2010/main" val="2553582895"/>
+        <p14:creationId xmlns:p14="http://schemas.microsoft.com/office/powerpoint/2010/main" val="2671097960"/>
       </p:ext>
     </p:extLst>
   </p:cSld>
@@ -5475,7 +5475,7 @@
     </p:spTree>
     <p:extLst>
       <p:ext uri="{BB962C8B-B14F-4D97-AF65-F5344CB8AC3E}">
-        <p14:creationId xmlns:p14="http://schemas.microsoft.com/office/powerpoint/2010/main" val="1003084797"/>
+        <p14:creationId xmlns:p14="http://schemas.microsoft.com/office/powerpoint/2010/main" val="3314004847"/>
       </p:ext>
     </p:extLst>
   </p:cSld>
@@ -7338,7 +7338,7 @@
     </p:spTree>
     <p:extLst>
       <p:ext uri="{BB962C8B-B14F-4D97-AF65-F5344CB8AC3E}">
-        <p14:creationId xmlns:p14="http://schemas.microsoft.com/office/powerpoint/2010/main" val="765233148"/>
+        <p14:creationId xmlns:p14="http://schemas.microsoft.com/office/powerpoint/2010/main" val="1502210520"/>
       </p:ext>
     </p:extLst>
   </p:cSld>
@@ -7997,7 +7997,7 @@
     </p:spTree>
     <p:extLst>
       <p:ext uri="{BB962C8B-B14F-4D97-AF65-F5344CB8AC3E}">
-        <p14:creationId xmlns:p14="http://schemas.microsoft.com/office/powerpoint/2010/main" val="3755191611"/>
+        <p14:creationId xmlns:p14="http://schemas.microsoft.com/office/powerpoint/2010/main" val="3026117893"/>
       </p:ext>
     </p:extLst>
   </p:cSld>
@@ -8293,7 +8293,7 @@
     </p:spTree>
     <p:extLst>
       <p:ext uri="{BB962C8B-B14F-4D97-AF65-F5344CB8AC3E}">
-        <p14:creationId xmlns:p14="http://schemas.microsoft.com/office/powerpoint/2010/main" val="3763950227"/>
+        <p14:creationId xmlns:p14="http://schemas.microsoft.com/office/powerpoint/2010/main" val="1381986067"/>
       </p:ext>
     </p:extLst>
   </p:cSld>
@@ -8511,7 +8511,7 @@
     </p:spTree>
     <p:extLst>
       <p:ext uri="{BB962C8B-B14F-4D97-AF65-F5344CB8AC3E}">
-        <p14:creationId xmlns:p14="http://schemas.microsoft.com/office/powerpoint/2010/main" val="2700890625"/>
+        <p14:creationId xmlns:p14="http://schemas.microsoft.com/office/powerpoint/2010/main" val="3799691456"/>
       </p:ext>
     </p:extLst>
   </p:cSld>
@@ -8743,7 +8743,7 @@
     </p:spTree>
     <p:extLst>
       <p:ext uri="{BB962C8B-B14F-4D97-AF65-F5344CB8AC3E}">
-        <p14:creationId xmlns:p14="http://schemas.microsoft.com/office/powerpoint/2010/main" val="2506411345"/>
+        <p14:creationId xmlns:p14="http://schemas.microsoft.com/office/powerpoint/2010/main" val="4047816312"/>
       </p:ext>
     </p:extLst>
   </p:cSld>
@@ -8983,7 +8983,7 @@
     </p:spTree>
     <p:extLst>
       <p:ext uri="{BB962C8B-B14F-4D97-AF65-F5344CB8AC3E}">
-        <p14:creationId xmlns:p14="http://schemas.microsoft.com/office/powerpoint/2010/main" val="448363648"/>
+        <p14:creationId xmlns:p14="http://schemas.microsoft.com/office/powerpoint/2010/main" val="2319196884"/>
       </p:ext>
     </p:extLst>
   </p:cSld>
@@ -9201,7 +9201,7 @@
     </p:spTree>
     <p:extLst>
       <p:ext uri="{BB962C8B-B14F-4D97-AF65-F5344CB8AC3E}">
-        <p14:creationId xmlns:p14="http://schemas.microsoft.com/office/powerpoint/2010/main" val="507451831"/>
+        <p14:creationId xmlns:p14="http://schemas.microsoft.com/office/powerpoint/2010/main" val="1760905632"/>
       </p:ext>
     </p:extLst>
   </p:cSld>
@@ -9441,7 +9441,7 @@
     </p:spTree>
     <p:extLst>
       <p:ext uri="{BB962C8B-B14F-4D97-AF65-F5344CB8AC3E}">
-        <p14:creationId xmlns:p14="http://schemas.microsoft.com/office/powerpoint/2010/main" val="341572314"/>
+        <p14:creationId xmlns:p14="http://schemas.microsoft.com/office/powerpoint/2010/main" val="293241090"/>
       </p:ext>
     </p:extLst>
   </p:cSld>
